--- a/site/RVC_Legislator_Deck.pptx
+++ b/site/RVC_Legislator_Deck.pptx
@@ -5926,7 +5926,7 @@
                 </a:solidFill>
                 <a:latin typeface="Georgia"/>
               </a:rPr>
-              <a:t>5–65</a:t>
+              <a:t>≈$4,700</a:t>
             </a:r>
             <a:r>
               <a:rPr sz="1600" b="0" i="1">
@@ -5935,7 +5935,7 @@
                 </a:solidFill>
                 <a:latin typeface="Georgia"/>
               </a:rPr>
-              <a:t> %</a:t>
+              <a:t> /yr</a:t>
             </a:r>
           </a:p>
         </p:txBody>
@@ -5974,7 +5974,7 @@
                 </a:solidFill>
                 <a:latin typeface="Arial"/>
               </a:rPr>
-              <a:t>A §467 parcel's school-tax share stops shifting onto every other taxpayer. The levy is fixed; exemptions move it around.</a:t>
+              <a:t>School tax un-shifted from neighbors at §467's 50% tier, on a ~$9.4K school bill (est.). It's a sliding scale by income — 65% (≤$47K) down to 5% ($58.4K) — so ≈$470–$6,100 per home. The levy is fixed; exemptions move it around.</a:t>
             </a:r>
           </a:p>
         </p:txBody>
@@ -6009,7 +6009,7 @@
                 </a:solidFill>
                 <a:latin typeface="Courier New"/>
               </a:rPr>
-              <a:t>OSC · NASSAU BROCHURE REV. 3-26</a:t>
+              <a:t>OSC · NASSAU BROCHURE · BILL ASSUMPTION LABELED</a:t>
             </a:r>
           </a:p>
         </p:txBody>

--- a/site/RVC_Legislator_Deck.pptx
+++ b/site/RVC_Legislator_Deck.pptx
@@ -5926,7 +5926,7 @@
                 </a:solidFill>
                 <a:latin typeface="Georgia"/>
               </a:rPr>
-              <a:t>≈$4,700</a:t>
+              <a:t>≈$7,300</a:t>
             </a:r>
             <a:r>
               <a:rPr sz="1600" b="0" i="1">
@@ -5974,7 +5974,7 @@
                 </a:solidFill>
                 <a:latin typeface="Arial"/>
               </a:rPr>
-              <a:t>School tax un-shifted from neighbors at §467's 50% tier, on a ~$9.4K school bill (est.). It's a sliding scale by income — 65% (≤$47K) down to 5% ($58.4K) — so ≈$470–$6,100 per home. The levy is fixed; exemptions move it around.</a:t>
+              <a:t>School tax un-shifted from neighbors at §467's 50% tier, on a verified ~$14.7K school bill. It's a sliding scale by income — 65% (≤$47K) down to 5% ($58.4K) — so ≈$730–$9,500 per home. The levy is fixed; exemptions move it around.</a:t>
             </a:r>
           </a:p>
         </p:txBody>
@@ -6009,7 +6009,7 @@
                 </a:solidFill>
                 <a:latin typeface="Courier New"/>
               </a:rPr>
-              <a:t>OSC · NASSAU BROCHURE · BILL ASSUMPTION LABELED</a:t>
+              <a:t>OSC · NASSAU BROCHURE · NASSAU LRV PARCEL TAX TABLE 2025-26</a:t>
             </a:r>
           </a:p>
         </p:txBody>
